--- a/yunqi-2026-pai-forum/docs/洞察一页-02-云原生 AI 的下一站：Agentic AI Platf.pptx
+++ b/yunqi-2026-pai-forum/docs/洞察一页-02-云原生 AI 的下一站：Agentic AI Platf.pptx
@@ -3141,7 +3141,7 @@
         <p:spPr>
           <a:xfrm>
             <a:off x="0" y="0"/>
-            <a:ext cx="12191695" cy="1051560"/>
+            <a:ext cx="12191695" cy="1097280"/>
           </a:xfrm>
           <a:prstGeom prst="rect">
             <a:avLst/>
@@ -3183,8 +3183,8 @@
         </p:nvSpPr>
         <p:spPr>
           <a:xfrm>
-            <a:off x="365760" y="146304"/>
-            <a:ext cx="11430000" cy="274320"/>
+            <a:off x="320040" y="91440"/>
+            <a:ext cx="11521440" cy="237744"/>
           </a:xfrm>
           <a:prstGeom prst="rect">
             <a:avLst/>
@@ -3199,7 +3199,7 @@
           <a:p>
             <a:pPr algn="l"/>
             <a:r>
-              <a:rPr sz="1300" b="0">
+              <a:rPr sz="1200" b="0">
                 <a:solidFill>
                   <a:srgbClr val="6B6B6B"/>
                 </a:solidFill>
@@ -3219,8 +3219,8 @@
         </p:nvSpPr>
         <p:spPr>
           <a:xfrm>
-            <a:off x="365760" y="420624"/>
-            <a:ext cx="11430000" cy="502920"/>
+            <a:off x="320040" y="347472"/>
+            <a:ext cx="11521440" cy="658368"/>
           </a:xfrm>
           <a:prstGeom prst="rect">
             <a:avLst/>
@@ -3235,14 +3235,14 @@
           <a:p>
             <a:pPr algn="l"/>
             <a:r>
-              <a:rPr sz="2000" b="1">
+              <a:rPr sz="1600" b="1">
                 <a:solidFill>
                   <a:srgbClr val="1A1A1A"/>
                 </a:solidFill>
                 <a:latin typeface="Microsoft YaHei"/>
                 <a:ea typeface="Microsoft YaHei"/>
               </a:rPr>
-              <a:t>洞察：Agentic AI Platform 的核心不是聊天 UI，而是把万卡工程闭环与专家方法产品…</a:t>
+              <a:t>洞察：Agentic AI Platform 的核心不是聊天 UI，而是把万卡工程闭环与专家方法产品化为可调用 Skills。</a:t>
             </a:r>
           </a:p>
         </p:txBody>
@@ -3255,8 +3255,8 @@
         </p:nvSpPr>
         <p:spPr>
           <a:xfrm>
-            <a:off x="320040" y="1207008"/>
-            <a:ext cx="11521440" cy="502920"/>
+            <a:off x="274320" y="1207008"/>
+            <a:ext cx="11612880" cy="749808"/>
           </a:xfrm>
           <a:prstGeom prst="rect">
             <a:avLst/>
@@ -3300,8 +3300,8 @@
         </p:nvSpPr>
         <p:spPr>
           <a:xfrm>
-            <a:off x="457200" y="1298448"/>
-            <a:ext cx="11247120" cy="365760"/>
+            <a:off x="411480" y="1261872"/>
+            <a:ext cx="11338560" cy="640080"/>
           </a:xfrm>
           <a:prstGeom prst="rect">
             <a:avLst/>
@@ -3316,14 +3316,14 @@
           <a:p>
             <a:pPr algn="l"/>
             <a:r>
-              <a:rPr sz="1300" b="1">
+              <a:rPr sz="1200" b="1">
                 <a:solidFill>
                   <a:srgbClr val="1A1A1A"/>
                 </a:solidFill>
                 <a:latin typeface="Microsoft YaHei"/>
                 <a:ea typeface="Microsoft YaHei"/>
               </a:rPr>
-              <a:t>一句话判断：演讲主张 AI 基础设施要从「提供功能」走向「交付结果」。针对万卡训练配置-运行-诊断-验证的高成本闭环，提出 Agentic PAI：通过重复劳动自动化、专家知识普惠化、智慧成果资产化、定制能力标准化四阶段，把平台能…</a:t>
+              <a:t>一句话判断：演讲主张 AI 基础设施要从「提供功能」走向「交付结果」。针对万卡训练配置-运行-诊断-验证的高成本闭环，提出 Agentic PAI：通过重复劳动自动化、专家知识普惠化、智慧成果资产化、定制能力标准化四阶段，把平台能力转化为企业组织能力，并以 CLI/MCP/Skills 对 Agent 开放，同时提供评测-微调-蒸馏的模型侧优化闭环。</a:t>
             </a:r>
           </a:p>
         </p:txBody>
@@ -3336,8 +3336,8 @@
         </p:nvSpPr>
         <p:spPr>
           <a:xfrm>
-            <a:off x="320040" y="1874519"/>
-            <a:ext cx="3703320" cy="2606040"/>
+            <a:off x="274320" y="2084831"/>
+            <a:ext cx="3749039" cy="2267712"/>
           </a:xfrm>
           <a:prstGeom prst="rect">
             <a:avLst/>
@@ -3381,8 +3381,8 @@
         </p:nvSpPr>
         <p:spPr>
           <a:xfrm>
-            <a:off x="457200" y="2011679"/>
-            <a:ext cx="3429000" cy="320040"/>
+            <a:off x="402336" y="2176271"/>
+            <a:ext cx="3493007" cy="292608"/>
           </a:xfrm>
           <a:prstGeom prst="rect">
             <a:avLst/>
@@ -3397,14 +3397,14 @@
           <a:p>
             <a:pPr algn="l"/>
             <a:r>
-              <a:rPr sz="1500" b="1">
+              <a:rPr sz="1400" b="1">
                 <a:solidFill>
                   <a:srgbClr val="8B1A2B"/>
                 </a:solidFill>
                 <a:latin typeface="Microsoft YaHei"/>
                 <a:ea typeface="Microsoft YaHei"/>
               </a:rPr>
-              <a:t>01  传统平台交互难以承载万卡工程复…</a:t>
+              <a:t>01  传统平台交互难以承载万卡工程复杂度</a:t>
             </a:r>
           </a:p>
         </p:txBody>
@@ -3417,8 +3417,8 @@
         </p:nvSpPr>
         <p:spPr>
           <a:xfrm>
-            <a:off x="484632" y="2377439"/>
-            <a:ext cx="3374136" cy="1965960"/>
+            <a:off x="402336" y="2487167"/>
+            <a:ext cx="3493007" cy="1764792"/>
           </a:xfrm>
           <a:prstGeom prst="rect">
             <a:avLst/>
@@ -3433,28 +3433,45 @@
           <a:p>
             <a:pPr algn="l">
               <a:spcAft>
-                <a:spcPts val="400"/>
+                <a:spcPts val="200"/>
               </a:spcAft>
             </a:pPr>
             <a:r>
-              <a:rPr sz="1200" b="1">
+              <a:rPr sz="1100" b="1">
                 <a:solidFill>
                   <a:srgbClr val="1A1A1A"/>
                 </a:solidFill>
                 <a:latin typeface="Microsoft YaHei"/>
                 <a:ea typeface="Microsoft YaHei"/>
               </a:rPr>
-              <a:t>万卡级训练从「能跑」到「跑稳跑快」需反复经历配置方案、规模运行、诊断定位、调整验证</a:t>
+              <a:t>仅卖算力与控制台不够</a:t>
             </a:r>
           </a:p>
           <a:p>
             <a:pPr algn="l">
               <a:spcAft>
-                <a:spcPts val="400"/>
+                <a:spcPts val="200"/>
               </a:spcAft>
             </a:pPr>
             <a:r>
-              <a:rPr sz="1200" b="0">
+              <a:rPr sz="1100" b="0">
+                <a:solidFill>
+                  <a:srgbClr val="4A4A4A"/>
+                </a:solidFill>
+                <a:latin typeface="Microsoft YaHei"/>
+                <a:ea typeface="Microsoft YaHei"/>
+              </a:rPr>
+              <a:t>• 万卡级训练从「能跑」到「跑稳跑快」需反复经历配置方案、规模运行、诊断定位、调整验证</a:t>
+            </a:r>
+          </a:p>
+          <a:p>
+            <a:pPr algn="l">
+              <a:spcAft>
+                <a:spcPts val="200"/>
+              </a:spcAft>
+            </a:pPr>
+            <a:r>
+              <a:rPr sz="1100" b="0">
                 <a:solidFill>
                   <a:srgbClr val="4A4A4A"/>
                 </a:solidFill>
@@ -3467,11 +3484,11 @@
           <a:p>
             <a:pPr algn="l">
               <a:spcAft>
-                <a:spcPts val="400"/>
+                <a:spcPts val="200"/>
               </a:spcAft>
             </a:pPr>
             <a:r>
-              <a:rPr sz="1200" b="0">
+              <a:rPr sz="1100" b="0">
                 <a:solidFill>
                   <a:srgbClr val="4A4A4A"/>
                 </a:solidFill>
@@ -3491,8 +3508,8 @@
         </p:nvSpPr>
         <p:spPr>
           <a:xfrm>
-            <a:off x="4224528" y="1874519"/>
-            <a:ext cx="3703320" cy="2606040"/>
+            <a:off x="4187951" y="2084831"/>
+            <a:ext cx="3749039" cy="2267712"/>
           </a:xfrm>
           <a:prstGeom prst="rect">
             <a:avLst/>
@@ -3536,8 +3553,8 @@
         </p:nvSpPr>
         <p:spPr>
           <a:xfrm>
-            <a:off x="4361688" y="2011679"/>
-            <a:ext cx="3429000" cy="320040"/>
+            <a:off x="4315967" y="2176271"/>
+            <a:ext cx="3493007" cy="292608"/>
           </a:xfrm>
           <a:prstGeom prst="rect">
             <a:avLst/>
@@ -3552,14 +3569,14 @@
           <a:p>
             <a:pPr algn="l"/>
             <a:r>
-              <a:rPr sz="1500" b="1">
+              <a:rPr sz="1400" b="1">
                 <a:solidFill>
                   <a:srgbClr val="8B1A2B"/>
                 </a:solidFill>
                 <a:latin typeface="Microsoft YaHei"/>
                 <a:ea typeface="Microsoft YaHei"/>
               </a:rPr>
-              <a:t>02  平台能力四阶段：从完成任务到形…</a:t>
+              <a:t>02  从完成任务到形成组织能力</a:t>
             </a:r>
           </a:p>
         </p:txBody>
@@ -3572,8 +3589,8 @@
         </p:nvSpPr>
         <p:spPr>
           <a:xfrm>
-            <a:off x="4389120" y="2377439"/>
-            <a:ext cx="3374136" cy="1965960"/>
+            <a:off x="4315967" y="2487167"/>
+            <a:ext cx="3493007" cy="1764792"/>
           </a:xfrm>
           <a:prstGeom prst="rect">
             <a:avLst/>
@@ -3588,28 +3605,45 @@
           <a:p>
             <a:pPr algn="l">
               <a:spcAft>
-                <a:spcPts val="400"/>
+                <a:spcPts val="200"/>
               </a:spcAft>
             </a:pPr>
             <a:r>
-              <a:rPr sz="1200" b="1">
+              <a:rPr sz="1100" b="1">
                 <a:solidFill>
                   <a:srgbClr val="1A1A1A"/>
                 </a:solidFill>
                 <a:latin typeface="Microsoft YaHei"/>
                 <a:ea typeface="Microsoft YaHei"/>
               </a:rPr>
-              <a:t>重复劳动自动化：跨产品跨地域批量与周期任务可自动完成</a:t>
+              <a:t>产品路线图应按「自动化→专家 Skill→资产沉淀→标准化开放」递进建设，否则 Agent 平台只是聊天外壳。</a:t>
             </a:r>
           </a:p>
           <a:p>
             <a:pPr algn="l">
               <a:spcAft>
-                <a:spcPts val="400"/>
+                <a:spcPts val="200"/>
               </a:spcAft>
             </a:pPr>
             <a:r>
-              <a:rPr sz="1200" b="0">
+              <a:rPr sz="1100" b="0">
+                <a:solidFill>
+                  <a:srgbClr val="4A4A4A"/>
+                </a:solidFill>
+                <a:latin typeface="Microsoft YaHei"/>
+                <a:ea typeface="Microsoft YaHei"/>
+              </a:rPr>
+              <a:t>• 重复劳动自动化：跨产品跨地域批量与周期任务可自动完成</a:t>
+            </a:r>
+          </a:p>
+          <a:p>
+            <a:pPr algn="l">
+              <a:spcAft>
+                <a:spcPts val="200"/>
+              </a:spcAft>
+            </a:pPr>
+            <a:r>
+              <a:rPr sz="1100" b="0">
                 <a:solidFill>
                   <a:srgbClr val="4A4A4A"/>
                 </a:solidFill>
@@ -3622,11 +3656,11 @@
           <a:p>
             <a:pPr algn="l">
               <a:spcAft>
-                <a:spcPts val="400"/>
+                <a:spcPts val="200"/>
               </a:spcAft>
             </a:pPr>
             <a:r>
-              <a:rPr sz="1200" b="0">
+              <a:rPr sz="1100" b="0">
                 <a:solidFill>
                   <a:srgbClr val="4A4A4A"/>
                 </a:solidFill>
@@ -3636,23 +3670,6 @@
               <a:t>• 智慧成果资产化：验证过的配置、流程与性能证据可持续复用</a:t>
             </a:r>
           </a:p>
-          <a:p>
-            <a:pPr algn="l">
-              <a:spcAft>
-                <a:spcPts val="400"/>
-              </a:spcAft>
-            </a:pPr>
-            <a:r>
-              <a:rPr sz="1200" b="0">
-                <a:solidFill>
-                  <a:srgbClr val="4A4A4A"/>
-                </a:solidFill>
-                <a:latin typeface="Microsoft YaHei"/>
-                <a:ea typeface="Microsoft YaHei"/>
-              </a:rPr>
-              <a:t>• 定制能力标准化：企业自有流程与专家经验沉淀为可开放调用的标准能力</a:t>
-            </a:r>
-          </a:p>
         </p:txBody>
       </p:sp>
       <p:sp>
@@ -3663,8 +3680,8 @@
         </p:nvSpPr>
         <p:spPr>
           <a:xfrm>
-            <a:off x="8129016" y="1874519"/>
-            <a:ext cx="3703320" cy="2606040"/>
+            <a:off x="8101582" y="2084831"/>
+            <a:ext cx="3749039" cy="2267712"/>
           </a:xfrm>
           <a:prstGeom prst="rect">
             <a:avLst/>
@@ -3708,8 +3725,8 @@
         </p:nvSpPr>
         <p:spPr>
           <a:xfrm>
-            <a:off x="8266176" y="2011679"/>
-            <a:ext cx="3429000" cy="320040"/>
+            <a:off x="8229598" y="2176271"/>
+            <a:ext cx="3493007" cy="292608"/>
           </a:xfrm>
           <a:prstGeom prst="rect">
             <a:avLst/>
@@ -3724,14 +3741,14 @@
           <a:p>
             <a:pPr algn="l"/>
             <a:r>
-              <a:rPr sz="1500" b="1">
+              <a:rPr sz="1400" b="1">
                 <a:solidFill>
                   <a:srgbClr val="8B1A2B"/>
                 </a:solidFill>
                 <a:latin typeface="Microsoft YaHei"/>
                 <a:ea typeface="Microsoft YaHei"/>
               </a:rPr>
-              <a:t>03  重复劳动自动化：批量实验创建/…</a:t>
+              <a:t>03  批量实验创建/调度/跟踪</a:t>
             </a:r>
           </a:p>
         </p:txBody>
@@ -3744,8 +3761,8 @@
         </p:nvSpPr>
         <p:spPr>
           <a:xfrm>
-            <a:off x="8293608" y="2377439"/>
-            <a:ext cx="3374136" cy="1965960"/>
+            <a:off x="8229598" y="2487167"/>
+            <a:ext cx="3493007" cy="1764792"/>
           </a:xfrm>
           <a:prstGeom prst="rect">
             <a:avLst/>
@@ -3760,28 +3777,45 @@
           <a:p>
             <a:pPr algn="l">
               <a:spcAft>
-                <a:spcPts val="400"/>
+                <a:spcPts val="200"/>
               </a:spcAft>
             </a:pPr>
             <a:r>
-              <a:rPr sz="1200" b="1">
+              <a:rPr sz="1100" b="1">
                 <a:solidFill>
                   <a:srgbClr val="1A1A1A"/>
                 </a:solidFill>
                 <a:latin typeface="Microsoft YaHei"/>
                 <a:ea typeface="Microsoft YaHei"/>
               </a:rPr>
-              <a:t>自然语言意图驱动：克隆基线任务并展开学习率×batch 参数组合实验</a:t>
+              <a:t>训练平台应支持意图级「参数扫掠 + 并发配额 + 结果聚合」，减少研究员手工填表与重提任务。</a:t>
             </a:r>
           </a:p>
           <a:p>
             <a:pPr algn="l">
               <a:spcAft>
-                <a:spcPts val="400"/>
+                <a:spcPts val="200"/>
               </a:spcAft>
             </a:pPr>
             <a:r>
-              <a:rPr sz="1200" b="0">
+              <a:rPr sz="1100" b="0">
+                <a:solidFill>
+                  <a:srgbClr val="4A4A4A"/>
+                </a:solidFill>
+                <a:latin typeface="Microsoft YaHei"/>
+                <a:ea typeface="Microsoft YaHei"/>
+              </a:rPr>
+              <a:t>• 自然语言意图驱动：克隆基线任务并展开学习率×batch 参数组合实验</a:t>
+            </a:r>
+          </a:p>
+          <a:p>
+            <a:pPr algn="l">
+              <a:spcAft>
+                <a:spcPts val="200"/>
+              </a:spcAft>
+            </a:pPr>
+            <a:r>
+              <a:rPr sz="1100" b="0">
                 <a:solidFill>
                   <a:srgbClr val="4A4A4A"/>
                 </a:solidFill>
@@ -3794,11 +3828,11 @@
           <a:p>
             <a:pPr algn="l">
               <a:spcAft>
-                <a:spcPts val="400"/>
+                <a:spcPts val="200"/>
               </a:spcAft>
             </a:pPr>
             <a:r>
-              <a:rPr sz="1200" b="0">
+              <a:rPr sz="1100" b="0">
                 <a:solidFill>
                   <a:srgbClr val="4A4A4A"/>
                 </a:solidFill>
@@ -3818,8 +3852,8 @@
         </p:nvSpPr>
         <p:spPr>
           <a:xfrm>
-            <a:off x="320040" y="4617720"/>
-            <a:ext cx="7315200" cy="256032"/>
+            <a:off x="274320" y="4553712"/>
+            <a:ext cx="7315200" cy="237744"/>
           </a:xfrm>
           <a:prstGeom prst="rect">
             <a:avLst/>
@@ -3834,7 +3868,7 @@
           <a:p>
             <a:pPr algn="l"/>
             <a:r>
-              <a:rPr sz="1400" b="1">
+              <a:rPr sz="1300" b="1">
                 <a:solidFill>
                   <a:srgbClr val="1A1A1A"/>
                 </a:solidFill>
@@ -3854,8 +3888,8 @@
         </p:nvSpPr>
         <p:spPr>
           <a:xfrm>
-            <a:off x="320040" y="4910328"/>
-            <a:ext cx="1847088" cy="868680"/>
+            <a:off x="274320" y="4809744"/>
+            <a:ext cx="1874519" cy="960120"/>
           </a:xfrm>
           <a:prstGeom prst="rect">
             <a:avLst/>
@@ -3899,8 +3933,8 @@
         </p:nvSpPr>
         <p:spPr>
           <a:xfrm>
-            <a:off x="429768" y="4965192"/>
-            <a:ext cx="1664208" cy="201168"/>
+            <a:off x="365760" y="4864608"/>
+            <a:ext cx="1709927" cy="201168"/>
           </a:xfrm>
           <a:prstGeom prst="rect">
             <a:avLst/>
@@ -3922,7 +3956,7 @@
                 <a:latin typeface="Microsoft YaHei"/>
                 <a:ea typeface="Microsoft YaHei"/>
               </a:rPr>
-              <a:t>传统平台交互难以承载万…</a:t>
+              <a:t>示例规模</a:t>
             </a:r>
           </a:p>
         </p:txBody>
@@ -3935,8 +3969,8 @@
         </p:nvSpPr>
         <p:spPr>
           <a:xfrm>
-            <a:off x="429768" y="5166360"/>
-            <a:ext cx="1664208" cy="237744"/>
+            <a:off x="365760" y="5065776"/>
+            <a:ext cx="1709927" cy="256032"/>
           </a:xfrm>
           <a:prstGeom prst="rect">
             <a:avLst/>
@@ -3958,7 +3992,7 @@
                 <a:latin typeface="Microsoft YaHei"/>
                 <a:ea typeface="Microsoft YaHei"/>
               </a:rPr>
-              <a:t>万卡级训练从「能跑」到「跑稳跑…</a:t>
+              <a:t>演讲口径</a:t>
             </a:r>
           </a:p>
         </p:txBody>
@@ -3971,8 +4005,8 @@
         </p:nvSpPr>
         <p:spPr>
           <a:xfrm>
-            <a:off x="429768" y="5413248"/>
-            <a:ext cx="1664208" cy="292608"/>
+            <a:off x="365760" y="5340096"/>
+            <a:ext cx="1709927" cy="365760"/>
           </a:xfrm>
           <a:prstGeom prst="rect">
             <a:avLst/>
@@ -3987,14 +4021,14 @@
           <a:p>
             <a:pPr algn="l"/>
             <a:r>
-              <a:rPr sz="1400" b="1">
+              <a:rPr sz="1200" b="1">
                 <a:solidFill>
                   <a:srgbClr val="8B1A2B"/>
                 </a:solidFill>
                 <a:latin typeface="Microsoft YaHei"/>
                 <a:ea typeface="Microsoft YaHei"/>
               </a:rPr>
-              <a:t>示例规模：1 万卡 × 10 小时…</a:t>
+              <a:t>1 万卡 × 10 小时 = 10 万 GPU-h/轮尝试</a:t>
             </a:r>
           </a:p>
         </p:txBody>
@@ -4007,8 +4041,8 @@
         </p:nvSpPr>
         <p:spPr>
           <a:xfrm>
-            <a:off x="2276856" y="4910328"/>
-            <a:ext cx="1847088" cy="868680"/>
+            <a:off x="2240279" y="4809744"/>
+            <a:ext cx="1874519" cy="960120"/>
           </a:xfrm>
           <a:prstGeom prst="rect">
             <a:avLst/>
@@ -4052,8 +4086,8 @@
         </p:nvSpPr>
         <p:spPr>
           <a:xfrm>
-            <a:off x="2386584" y="4965192"/>
-            <a:ext cx="1664208" cy="201168"/>
+            <a:off x="2331719" y="4864608"/>
+            <a:ext cx="1709927" cy="201168"/>
           </a:xfrm>
           <a:prstGeom prst="rect">
             <a:avLst/>
@@ -4075,7 +4109,7 @@
                 <a:latin typeface="Microsoft YaHei"/>
                 <a:ea typeface="Microsoft YaHei"/>
               </a:rPr>
-              <a:t>平台能力四阶段：从完成…</a:t>
+              <a:t>从完成任务到形成组织能力</a:t>
             </a:r>
           </a:p>
         </p:txBody>
@@ -4088,8 +4122,8 @@
         </p:nvSpPr>
         <p:spPr>
           <a:xfrm>
-            <a:off x="2386584" y="5166360"/>
-            <a:ext cx="1664208" cy="237744"/>
+            <a:off x="2331719" y="5065776"/>
+            <a:ext cx="1709927" cy="256032"/>
           </a:xfrm>
           <a:prstGeom prst="rect">
             <a:avLst/>
@@ -4111,7 +4145,7 @@
                 <a:latin typeface="Microsoft YaHei"/>
                 <a:ea typeface="Microsoft YaHei"/>
               </a:rPr>
-              <a:t>重复劳动自动化：跨产品跨地域批…</a:t>
+              <a:t>核心口径</a:t>
             </a:r>
           </a:p>
         </p:txBody>
@@ -4124,8 +4158,8 @@
         </p:nvSpPr>
         <p:spPr>
           <a:xfrm>
-            <a:off x="2386584" y="5413248"/>
-            <a:ext cx="1664208" cy="292608"/>
+            <a:off x="2331719" y="5340096"/>
+            <a:ext cx="1709927" cy="365760"/>
           </a:xfrm>
           <a:prstGeom prst="rect">
             <a:avLst/>
@@ -4140,14 +4174,14 @@
           <a:p>
             <a:pPr algn="l"/>
             <a:r>
-              <a:rPr sz="1400" b="1">
+              <a:rPr sz="1200" b="1">
                 <a:solidFill>
                   <a:srgbClr val="8B1A2B"/>
                 </a:solidFill>
                 <a:latin typeface="Microsoft YaHei"/>
                 <a:ea typeface="Microsoft YaHei"/>
               </a:rPr>
-              <a:t>重复劳动自动化：跨产品跨地…</a:t>
+              <a:t>重复劳动自动化：跨产品跨地域批量与周期任务可自动完成</a:t>
             </a:r>
           </a:p>
         </p:txBody>
@@ -4160,8 +4194,8 @@
         </p:nvSpPr>
         <p:spPr>
           <a:xfrm>
-            <a:off x="4233672" y="4910328"/>
-            <a:ext cx="1847088" cy="868680"/>
+            <a:off x="4206238" y="4809744"/>
+            <a:ext cx="1874519" cy="960120"/>
           </a:xfrm>
           <a:prstGeom prst="rect">
             <a:avLst/>
@@ -4205,8 +4239,8 @@
         </p:nvSpPr>
         <p:spPr>
           <a:xfrm>
-            <a:off x="4343400" y="4965192"/>
-            <a:ext cx="1664208" cy="201168"/>
+            <a:off x="4297678" y="4864608"/>
+            <a:ext cx="1709927" cy="201168"/>
           </a:xfrm>
           <a:prstGeom prst="rect">
             <a:avLst/>
@@ -4228,7 +4262,7 @@
                 <a:latin typeface="Microsoft YaHei"/>
                 <a:ea typeface="Microsoft YaHei"/>
               </a:rPr>
-              <a:t>重复劳动自动化：批量实…</a:t>
+              <a:t>批量实验创建/调度/跟踪</a:t>
             </a:r>
           </a:p>
         </p:txBody>
@@ -4241,8 +4275,8 @@
         </p:nvSpPr>
         <p:spPr>
           <a:xfrm>
-            <a:off x="4343400" y="5166360"/>
-            <a:ext cx="1664208" cy="237744"/>
+            <a:off x="4297678" y="5065776"/>
+            <a:ext cx="1709927" cy="256032"/>
           </a:xfrm>
           <a:prstGeom prst="rect">
             <a:avLst/>
@@ -4264,7 +4298,7 @@
                 <a:latin typeface="Microsoft YaHei"/>
                 <a:ea typeface="Microsoft YaHei"/>
               </a:rPr>
-              <a:t>每组 8 卡</a:t>
+              <a:t>演讲口径</a:t>
             </a:r>
           </a:p>
         </p:txBody>
@@ -4277,8 +4311,8 @@
         </p:nvSpPr>
         <p:spPr>
           <a:xfrm>
-            <a:off x="4343400" y="5413248"/>
-            <a:ext cx="1664208" cy="292608"/>
+            <a:off x="4297678" y="5340096"/>
+            <a:ext cx="1709927" cy="365760"/>
           </a:xfrm>
           <a:prstGeom prst="rect">
             <a:avLst/>
@@ -4293,14 +4327,14 @@
           <a:p>
             <a:pPr algn="l"/>
             <a:r>
-              <a:rPr sz="1400" b="1">
+              <a:rPr sz="1200" b="1">
                 <a:solidFill>
                   <a:srgbClr val="8B1A2B"/>
                 </a:solidFill>
                 <a:latin typeface="Microsoft YaHei"/>
                 <a:ea typeface="Microsoft YaHei"/>
               </a:rPr>
-              <a:t>每组 8 卡</a:t>
+              <a:t>1 基线克隆出 6 组实验</a:t>
             </a:r>
           </a:p>
         </p:txBody>
@@ -4313,8 +4347,8 @@
         </p:nvSpPr>
         <p:spPr>
           <a:xfrm>
-            <a:off x="6190488" y="4910328"/>
-            <a:ext cx="1847088" cy="868680"/>
+            <a:off x="6172197" y="4809744"/>
+            <a:ext cx="1874519" cy="960120"/>
           </a:xfrm>
           <a:prstGeom prst="rect">
             <a:avLst/>
@@ -4358,8 +4392,8 @@
         </p:nvSpPr>
         <p:spPr>
           <a:xfrm>
-            <a:off x="6300216" y="4965192"/>
-            <a:ext cx="1664208" cy="201168"/>
+            <a:off x="6263637" y="4864608"/>
+            <a:ext cx="1709927" cy="201168"/>
           </a:xfrm>
           <a:prstGeom prst="rect">
             <a:avLst/>
@@ -4381,7 +4415,7 @@
                 <a:latin typeface="Microsoft YaHei"/>
                 <a:ea typeface="Microsoft YaHei"/>
               </a:rPr>
-              <a:t>专家知识普惠化：Cry…</a:t>
+              <a:t>批量实验创建/调度/跟踪·2</a:t>
             </a:r>
           </a:p>
         </p:txBody>
@@ -4394,8 +4428,8 @@
         </p:nvSpPr>
         <p:spPr>
           <a:xfrm>
-            <a:off x="6300216" y="5166360"/>
-            <a:ext cx="1664208" cy="237744"/>
+            <a:off x="6263637" y="5065776"/>
+            <a:ext cx="1709927" cy="256032"/>
           </a:xfrm>
           <a:prstGeom prst="rect">
             <a:avLst/>
@@ -4417,7 +4451,7 @@
                 <a:latin typeface="Microsoft YaHei"/>
                 <a:ea typeface="Microsoft YaHei"/>
               </a:rPr>
-              <a:t>峰值显存误差 &lt;0.01%</a:t>
+              <a:t>演讲口径</a:t>
             </a:r>
           </a:p>
         </p:txBody>
@@ -4430,8 +4464,8 @@
         </p:nvSpPr>
         <p:spPr>
           <a:xfrm>
-            <a:off x="6300216" y="5413248"/>
-            <a:ext cx="1664208" cy="292608"/>
+            <a:off x="6263637" y="5340096"/>
+            <a:ext cx="1709927" cy="365760"/>
           </a:xfrm>
           <a:prstGeom prst="rect">
             <a:avLst/>
@@ -4446,14 +4480,14 @@
           <a:p>
             <a:pPr algn="l"/>
             <a:r>
-              <a:rPr sz="1400" b="1">
+              <a:rPr sz="1200" b="1">
                 <a:solidFill>
                   <a:srgbClr val="8B1A2B"/>
                 </a:solidFill>
                 <a:latin typeface="Microsoft YaHei"/>
                 <a:ea typeface="Microsoft YaHei"/>
               </a:rPr>
-              <a:t>峰值显存误差 &lt;0.01%</a:t>
+              <a:t>每组 8 卡</a:t>
             </a:r>
           </a:p>
         </p:txBody>
@@ -4466,8 +4500,8 @@
         </p:nvSpPr>
         <p:spPr>
           <a:xfrm>
-            <a:off x="8147304" y="4910328"/>
-            <a:ext cx="1847088" cy="868680"/>
+            <a:off x="8138156" y="4809744"/>
+            <a:ext cx="1874519" cy="960120"/>
           </a:xfrm>
           <a:prstGeom prst="rect">
             <a:avLst/>
@@ -4511,8 +4545,8 @@
         </p:nvSpPr>
         <p:spPr>
           <a:xfrm>
-            <a:off x="8257032" y="4965192"/>
-            <a:ext cx="1664208" cy="201168"/>
+            <a:off x="8229596" y="4864608"/>
+            <a:ext cx="1709927" cy="201168"/>
           </a:xfrm>
           <a:prstGeom prst="rect">
             <a:avLst/>
@@ -4534,7 +4568,7 @@
                 <a:latin typeface="Microsoft YaHei"/>
                 <a:ea typeface="Microsoft YaHei"/>
               </a:rPr>
-              <a:t>智慧成果资产化：看板与…</a:t>
+              <a:t>批量实验创建/调度/跟踪·3</a:t>
             </a:r>
           </a:p>
         </p:txBody>
@@ -4547,8 +4581,8 @@
         </p:nvSpPr>
         <p:spPr>
           <a:xfrm>
-            <a:off x="8257032" y="5166360"/>
-            <a:ext cx="1664208" cy="237744"/>
+            <a:off x="8229596" y="5065776"/>
+            <a:ext cx="1709927" cy="256032"/>
           </a:xfrm>
           <a:prstGeom prst="rect">
             <a:avLst/>
@@ -4570,7 +4604,7 @@
                 <a:latin typeface="Microsoft YaHei"/>
                 <a:ea typeface="Microsoft YaHei"/>
               </a:rPr>
-              <a:t>五步闭环：生成调整看板→保存看…</a:t>
+              <a:t>演讲口径</a:t>
             </a:r>
           </a:p>
         </p:txBody>
@@ -4583,8 +4617,8 @@
         </p:nvSpPr>
         <p:spPr>
           <a:xfrm>
-            <a:off x="8257032" y="5413248"/>
-            <a:ext cx="1664208" cy="292608"/>
+            <a:off x="8229596" y="5340096"/>
+            <a:ext cx="1709927" cy="365760"/>
           </a:xfrm>
           <a:prstGeom prst="rect">
             <a:avLst/>
@@ -4599,14 +4633,14 @@
           <a:p>
             <a:pPr algn="l"/>
             <a:r>
-              <a:rPr sz="1400" b="1">
+              <a:rPr sz="1200" b="1">
                 <a:solidFill>
                   <a:srgbClr val="8B1A2B"/>
                 </a:solidFill>
                 <a:latin typeface="Microsoft YaHei"/>
                 <a:ea typeface="Microsoft YaHei"/>
               </a:rPr>
-              <a:t>关注指标含 GPU Utiliza…</a:t>
+              <a:t>最大并发 2 组</a:t>
             </a:r>
           </a:p>
         </p:txBody>
@@ -4619,8 +4653,8 @@
         </p:nvSpPr>
         <p:spPr>
           <a:xfrm>
-            <a:off x="10104120" y="4910328"/>
-            <a:ext cx="1847088" cy="868680"/>
+            <a:off x="10104115" y="4809744"/>
+            <a:ext cx="1874519" cy="960120"/>
           </a:xfrm>
           <a:prstGeom prst="rect">
             <a:avLst/>
@@ -4664,8 +4698,8 @@
         </p:nvSpPr>
         <p:spPr>
           <a:xfrm>
-            <a:off x="10213848" y="4965192"/>
-            <a:ext cx="1664208" cy="201168"/>
+            <a:off x="10195555" y="4864608"/>
+            <a:ext cx="1709927" cy="201168"/>
           </a:xfrm>
           <a:prstGeom prst="rect">
             <a:avLst/>
@@ -4687,7 +4721,7 @@
                 <a:latin typeface="Microsoft YaHei"/>
                 <a:ea typeface="Microsoft YaHei"/>
               </a:rPr>
-              <a:t>定制能力标准化：PAI…</a:t>
+              <a:t>批量实验创建/调度/跟踪·4</a:t>
             </a:r>
           </a:p>
         </p:txBody>
@@ -4700,8 +4734,8 @@
         </p:nvSpPr>
         <p:spPr>
           <a:xfrm>
-            <a:off x="10213848" y="5166360"/>
-            <a:ext cx="1664208" cy="237744"/>
+            <a:off x="10195555" y="5065776"/>
+            <a:ext cx="1709927" cy="256032"/>
           </a:xfrm>
           <a:prstGeom prst="rect">
             <a:avLst/>
@@ -4723,7 +4757,7 @@
                 <a:latin typeface="Microsoft YaHei"/>
                 <a:ea typeface="Microsoft YaHei"/>
               </a:rPr>
-              <a:t>CLI：YAML/JSON 批…</a:t>
+              <a:t>演讲口径</a:t>
             </a:r>
           </a:p>
         </p:txBody>
@@ -4736,8 +4770,8 @@
         </p:nvSpPr>
         <p:spPr>
           <a:xfrm>
-            <a:off x="10213848" y="5413248"/>
-            <a:ext cx="1664208" cy="292608"/>
+            <a:off x="10195555" y="5340096"/>
+            <a:ext cx="1709927" cy="365760"/>
           </a:xfrm>
           <a:prstGeom prst="rect">
             <a:avLst/>
@@ -4752,14 +4786,14 @@
           <a:p>
             <a:pPr algn="l"/>
             <a:r>
-              <a:rPr sz="1400" b="1">
+              <a:rPr sz="1200" b="1">
                 <a:solidFill>
                   <a:srgbClr val="8B1A2B"/>
                 </a:solidFill>
                 <a:latin typeface="Microsoft YaHei"/>
                 <a:ea typeface="Microsoft YaHei"/>
               </a:rPr>
-              <a:t>案例：230 个工作空间收敛管理为…</a:t>
+              <a:t>资源空闲巡检间隔约 30 分钟</a:t>
             </a:r>
           </a:p>
         </p:txBody>
@@ -4772,8 +4806,8 @@
         </p:nvSpPr>
         <p:spPr>
           <a:xfrm>
-            <a:off x="0" y="5989320"/>
-            <a:ext cx="12191695" cy="868680"/>
+            <a:off x="0" y="5870448"/>
+            <a:ext cx="12191695" cy="987552"/>
           </a:xfrm>
           <a:prstGeom prst="rect">
             <a:avLst/>
@@ -4815,8 +4849,8 @@
         </p:nvSpPr>
         <p:spPr>
           <a:xfrm>
-            <a:off x="365760" y="6080760"/>
-            <a:ext cx="11430000" cy="256032"/>
+            <a:off x="320040" y="5943600"/>
+            <a:ext cx="11521440" cy="502920"/>
           </a:xfrm>
           <a:prstGeom prst="rect">
             <a:avLst/>
@@ -4831,14 +4865,14 @@
           <a:p>
             <a:pPr algn="l"/>
             <a:r>
-              <a:rPr sz="1200" b="1">
+              <a:rPr sz="1100" b="1">
                 <a:solidFill>
                   <a:srgbClr val="1A1A1A"/>
                 </a:solidFill>
                 <a:latin typeface="Microsoft YaHei"/>
                 <a:ea typeface="Microsoft YaHei"/>
               </a:rPr>
-              <a:t>可落地动作：Agentic AI Platform 的核心不是聊天 UI，而是把万卡工程闭环与专家方法产品化为可调用 Skills。；开放面应覆盖 CLI + MCP + Skills，并保证结构化输出与安全 dry-run，便于企业 Agent 组…</a:t>
+              <a:t>可落地动作：Agentic AI Platform 的核心不是聊天 UI，而是把万卡工程闭环与专家方法产品化为可调用 Skills；开放面应覆盖 CLI + MCP + Skills，并保证结构化输出与安全 dry-run，便于企业 Agent 组合调用；成果资产化与模型评测/微调/蒸馏闭环，是把「完成一次任务」升级为「形成组织能力」的关键。</a:t>
             </a:r>
           </a:p>
         </p:txBody>
@@ -4851,8 +4885,8 @@
         </p:nvSpPr>
         <p:spPr>
           <a:xfrm>
-            <a:off x="365760" y="6373368"/>
-            <a:ext cx="11430000" cy="256032"/>
+            <a:off x="320040" y="6437376"/>
+            <a:ext cx="11521440" cy="256032"/>
           </a:xfrm>
           <a:prstGeom prst="rect">
             <a:avLst/>
@@ -4867,7 +4901,7 @@
           <a:p>
             <a:pPr algn="l"/>
             <a:r>
-              <a:rPr sz="1000" b="0">
+              <a:rPr sz="900" b="0">
                 <a:solidFill>
                   <a:srgbClr val="6B6B6B"/>
                 </a:solidFill>
@@ -5109,7 +5143,7 @@
         <p:spPr>
           <a:xfrm>
             <a:off x="429768" y="1143000"/>
-            <a:ext cx="3496970" cy="292608"/>
+            <a:ext cx="3496970" cy="384048"/>
           </a:xfrm>
           <a:prstGeom prst="rect">
             <a:avLst/>
@@ -5131,7 +5165,7 @@
                 <a:latin typeface="Microsoft YaHei"/>
                 <a:ea typeface="Microsoft YaHei"/>
               </a:rPr>
-              <a:t>示例规模：1 万卡 × 10 小时…</a:t>
+              <a:t>示例规模：1 万卡 × 10 小时 = 10 万 GPU-h/轮尝试</a:t>
             </a:r>
           </a:p>
         </p:txBody>
@@ -5152,7 +5186,7 @@
         </p:blipFill>
         <p:spPr>
           <a:xfrm>
-            <a:off x="429768" y="1928092"/>
+            <a:off x="429768" y="1946380"/>
             <a:ext cx="3496970" cy="2965239"/>
           </a:xfrm>
           <a:prstGeom prst="rect">
@@ -5250,7 +5284,7 @@
         <p:spPr>
           <a:xfrm>
             <a:off x="4347362" y="1143000"/>
-            <a:ext cx="3496970" cy="292608"/>
+            <a:ext cx="3496970" cy="384048"/>
           </a:xfrm>
           <a:prstGeom prst="rect">
             <a:avLst/>
@@ -5272,7 +5306,7 @@
                 <a:latin typeface="Microsoft YaHei"/>
                 <a:ea typeface="Microsoft YaHei"/>
               </a:rPr>
-              <a:t>平台能力四阶段：从完成任务到形成组织能力</a:t>
+              <a:t>从完成任务到形成组织能力</a:t>
             </a:r>
           </a:p>
         </p:txBody>
@@ -5293,7 +5327,7 @@
         </p:blipFill>
         <p:spPr>
           <a:xfrm>
-            <a:off x="4347362" y="1928092"/>
+            <a:off x="4347362" y="1946380"/>
             <a:ext cx="3496970" cy="2965239"/>
           </a:xfrm>
           <a:prstGeom prst="rect">
@@ -5391,7 +5425,7 @@
         <p:spPr>
           <a:xfrm>
             <a:off x="8264956" y="1143000"/>
-            <a:ext cx="3496970" cy="292608"/>
+            <a:ext cx="3496970" cy="384048"/>
           </a:xfrm>
           <a:prstGeom prst="rect">
             <a:avLst/>
@@ -5413,7 +5447,7 @@
                 <a:latin typeface="Microsoft YaHei"/>
                 <a:ea typeface="Microsoft YaHei"/>
               </a:rPr>
-              <a:t>每组 8 卡</a:t>
+              <a:t>1 基线克隆出 6 组实验 · 每组 8 卡</a:t>
             </a:r>
           </a:p>
         </p:txBody>
@@ -5434,7 +5468,7 @@
         </p:blipFill>
         <p:spPr>
           <a:xfrm>
-            <a:off x="8264956" y="1928092"/>
+            <a:off x="8264956" y="1946380"/>
             <a:ext cx="3496970" cy="2965239"/>
           </a:xfrm>
           <a:prstGeom prst="rect">

--- a/yunqi-2026-pai-forum/docs/洞察一页-02-云原生 AI 的下一站：Agentic AI Platf.pptx
+++ b/yunqi-2026-pai-forum/docs/洞察一页-02-云原生 AI 的下一站：Agentic AI Platf.pptx
@@ -3323,7 +3323,7 @@
                 <a:latin typeface="Microsoft YaHei"/>
                 <a:ea typeface="Microsoft YaHei"/>
               </a:rPr>
-              <a:t>一句话判断：演讲主张 AI 基础设施要从「提供功能」走向「交付结果」。针对万卡训练配置-运行-诊断-验证的高成本闭环，提出 Agentic PAI：通过重复劳动自动化、专家知识普惠化、智慧成果资产化、定制能力标准化四阶段，把平台能力转化为企业组织能力，并以 CLI/MCP/Skills 对 Agent 开放，同时提供评测-微调-蒸馏的模型侧优化闭环。</a:t>
+              <a:t>一句话判断：阿里云 Agentic AI Platform / PAI——AI 基础设施要从「提供功能」走向「交付结果」。</a:t>
             </a:r>
           </a:p>
         </p:txBody>
@@ -3444,7 +3444,7 @@
                 <a:latin typeface="Microsoft YaHei"/>
                 <a:ea typeface="Microsoft YaHei"/>
               </a:rPr>
-              <a:t>仅卖算力与控制台不够</a:t>
+              <a:t>平台需用 Agent 自动闭环配置/诊断/验证，否则万卡客户会卡在人工运维成本上。</a:t>
             </a:r>
           </a:p>
           <a:p>
@@ -3956,7 +3956,7 @@
                 <a:latin typeface="Microsoft YaHei"/>
                 <a:ea typeface="Microsoft YaHei"/>
               </a:rPr>
-              <a:t>示例规模</a:t>
+              <a:t>峰值显存误差 &lt;</a:t>
             </a:r>
           </a:p>
         </p:txBody>
@@ -3992,7 +3992,7 @@
                 <a:latin typeface="Microsoft YaHei"/>
                 <a:ea typeface="Microsoft YaHei"/>
               </a:rPr>
-              <a:t>演讲口径</a:t>
+              <a:t>专家知识普惠化</a:t>
             </a:r>
           </a:p>
         </p:txBody>
@@ -4028,7 +4028,7 @@
                 <a:latin typeface="Microsoft YaHei"/>
                 <a:ea typeface="Microsoft YaHei"/>
               </a:rPr>
-              <a:t>1 万卡 × 10 小时 = 10 万 GPU-h/轮尝试</a:t>
+              <a:t>0.01%</a:t>
             </a:r>
           </a:p>
         </p:txBody>
@@ -4109,7 +4109,7 @@
                 <a:latin typeface="Microsoft YaHei"/>
                 <a:ea typeface="Microsoft YaHei"/>
               </a:rPr>
-              <a:t>从完成任务到形成组织能力</a:t>
+              <a:t>迭代时间平均误差</a:t>
             </a:r>
           </a:p>
         </p:txBody>
@@ -4145,7 +4145,7 @@
                 <a:latin typeface="Microsoft YaHei"/>
                 <a:ea typeface="Microsoft YaHei"/>
               </a:rPr>
-              <a:t>核心口径</a:t>
+              <a:t>专家知识普惠化</a:t>
             </a:r>
           </a:p>
         </p:txBody>
@@ -4181,7 +4181,7 @@
                 <a:latin typeface="Microsoft YaHei"/>
                 <a:ea typeface="Microsoft YaHei"/>
               </a:rPr>
-              <a:t>重复劳动自动化：跨产品跨地域批量与周期任务可自动完成</a:t>
+              <a:t>0.58%</a:t>
             </a:r>
           </a:p>
         </p:txBody>
@@ -4262,7 +4262,7 @@
                 <a:latin typeface="Microsoft YaHei"/>
                 <a:ea typeface="Microsoft YaHei"/>
               </a:rPr>
-              <a:t>批量实验创建/调度/跟踪</a:t>
+              <a:t>PAI PPU 单节点吞吐 +53%、双节点</a:t>
             </a:r>
           </a:p>
         </p:txBody>
@@ -4298,7 +4298,7 @@
                 <a:latin typeface="Microsoft YaHei"/>
                 <a:ea typeface="Microsoft YaHei"/>
               </a:rPr>
-              <a:t>演讲口径</a:t>
+              <a:t>专家知识普惠化</a:t>
             </a:r>
           </a:p>
         </p:txBody>
@@ -4334,7 +4334,7 @@
                 <a:latin typeface="Microsoft YaHei"/>
                 <a:ea typeface="Microsoft YaHei"/>
               </a:rPr>
-              <a:t>1 基线克隆出 6 组实验</a:t>
+              <a:t>+29%</a:t>
             </a:r>
           </a:p>
         </p:txBody>
@@ -4415,7 +4415,7 @@
                 <a:latin typeface="Microsoft YaHei"/>
                 <a:ea typeface="Microsoft YaHei"/>
               </a:rPr>
-              <a:t>批量实验创建/调度/跟踪·2</a:t>
+              <a:t>专家知识普惠化</a:t>
             </a:r>
           </a:p>
         </p:txBody>
@@ -4451,7 +4451,7 @@
                 <a:latin typeface="Microsoft YaHei"/>
                 <a:ea typeface="Microsoft YaHei"/>
               </a:rPr>
-              <a:t>演讲口径</a:t>
+              <a:t>Sparse4D：单节点 88.89</a:t>
             </a:r>
           </a:p>
         </p:txBody>
@@ -4487,7 +4487,7 @@
                 <a:latin typeface="Microsoft YaHei"/>
                 <a:ea typeface="Microsoft YaHei"/>
               </a:rPr>
-              <a:t>每组 8 卡</a:t>
+              <a:t>136.17 samples/s，双节点 196.92→253.47 samples/s</a:t>
             </a:r>
           </a:p>
         </p:txBody>
@@ -4568,7 +4568,7 @@
                 <a:latin typeface="Microsoft YaHei"/>
                 <a:ea typeface="Microsoft YaHei"/>
               </a:rPr>
-              <a:t>批量实验创建/调度/跟踪·3</a:t>
+              <a:t>批量实验创建/调度/跟踪</a:t>
             </a:r>
           </a:p>
         </p:txBody>
@@ -4604,7 +4604,7 @@
                 <a:latin typeface="Microsoft YaHei"/>
                 <a:ea typeface="Microsoft YaHei"/>
               </a:rPr>
-              <a:t>演讲口径</a:t>
+              <a:t>关键能力</a:t>
             </a:r>
           </a:p>
         </p:txBody>
@@ -4640,7 +4640,7 @@
                 <a:latin typeface="Microsoft YaHei"/>
                 <a:ea typeface="Microsoft YaHei"/>
               </a:rPr>
-              <a:t>最大并发 2 组</a:t>
+              <a:t>每组 8 卡</a:t>
             </a:r>
           </a:p>
         </p:txBody>
@@ -4721,7 +4721,7 @@
                 <a:latin typeface="Microsoft YaHei"/>
                 <a:ea typeface="Microsoft YaHei"/>
               </a:rPr>
-              <a:t>批量实验创建/调度/跟踪·4</a:t>
+              <a:t>批量实验创建/调度/跟踪</a:t>
             </a:r>
           </a:p>
         </p:txBody>
@@ -4757,7 +4757,7 @@
                 <a:latin typeface="Microsoft YaHei"/>
                 <a:ea typeface="Microsoft YaHei"/>
               </a:rPr>
-              <a:t>演讲口径</a:t>
+              <a:t>关键能力</a:t>
             </a:r>
           </a:p>
         </p:txBody>
@@ -4793,7 +4793,7 @@
                 <a:latin typeface="Microsoft YaHei"/>
                 <a:ea typeface="Microsoft YaHei"/>
               </a:rPr>
-              <a:t>资源空闲巡检间隔约 30 分钟</a:t>
+              <a:t>最大并发 2 组</a:t>
             </a:r>
           </a:p>
         </p:txBody>
@@ -4872,7 +4872,7 @@
                 <a:latin typeface="Microsoft YaHei"/>
                 <a:ea typeface="Microsoft YaHei"/>
               </a:rPr>
-              <a:t>可落地动作：Agentic AI Platform 的核心不是聊天 UI，而是把万卡工程闭环与专家方法产品化为可调用 Skills；开放面应覆盖 CLI + MCP + Skills，并保证结构化输出与安全 dry-run，便于企业 Agent 组合调用；成果资产化与模型评测/微调/蒸馏闭环，是把「完成一次任务」升级为「形成组织能力」的关键。</a:t>
+              <a:t>启示要点：Agentic AI Platform 的核心不是聊天 UI，而是把万卡工程闭环与专家方法产品化为可调用 Skills；开放面应覆盖 CLI + MCP + Skills，并保证结构化输出与安全 dry-run，便于企业 Agent 组合调用；成果资产化与模型评测/微调/蒸馏闭环，是把「完成一次任务」升级为「形成组织能力」的关键。</a:t>
             </a:r>
           </a:p>
         </p:txBody>
